--- a/product/01_taikenkai-kit/src/note_header.pptx
+++ b/product/01_taikenkai-kit/src/note_header.pptx
@@ -4280,7 +4280,7 @@
                 <a:ea typeface="Zen Maru Gothic"/>
                 <a:cs typeface="Zen Maru Gothic"/>
               </a:rPr>
-              <a:t>Instagram投稿2枚＋A4チラシ</a:t>
+              <a:t>Instagram投稿2枚＋A4チラシ（各2色）</a:t>
             </a:r>
           </a:p>
           <a:p>
@@ -4298,7 +4298,7 @@
                 <a:ea typeface="Zen Maru Gothic"/>
                 <a:cs typeface="Zen Maru Gothic"/>
               </a:rPr>
-              <a:t>文字を入れ替えるだけで完成</a:t>
+              <a:t>文字と写真を入れ替えて使えます</a:t>
             </a:r>
           </a:p>
         </p:txBody>
@@ -4443,8 +4443,8 @@
         </p:nvSpPr>
         <p:spPr>
           <a:xfrm>
-            <a:off x="7905750" y="2000250"/>
-            <a:ext cx="2381250" cy="952500"/>
+            <a:off x="7905750" y="1952625"/>
+            <a:ext cx="2381250" cy="762000"/>
           </a:xfrm>
           <a:prstGeom prst="rect">
             <a:avLst/>
@@ -4502,8 +4502,8 @@
         </p:nvSpPr>
         <p:spPr>
           <a:xfrm>
-            <a:off x="7905750" y="2762250"/>
-            <a:ext cx="2286000" cy="1143000"/>
+            <a:off x="7905750" y="2857500"/>
+            <a:ext cx="2286000" cy="1047750"/>
           </a:xfrm>
           <a:prstGeom prst="roundRect">
             <a:avLst>
@@ -4603,8 +4603,8 @@
     </a:clrScheme>
     <a:fontScheme name="Office">
       <a:majorFont>
-        <a:latin typeface="Calibri"/>
-        <a:ea typeface=""/>
+        <a:latin typeface="Zen Maru Gothic"/>
+        <a:ea typeface="Zen Maru Gothic"/>
         <a:cs typeface=""/>
         <a:font script="Jpan" typeface="ＭＳ Ｐゴシック"/>
         <a:font script="Hang" typeface="맑은 고딕"/>
@@ -4638,8 +4638,8 @@
         <a:font script="Geor" typeface="Sylfaen"/>
       </a:majorFont>
       <a:minorFont>
-        <a:latin typeface="Calibri"/>
-        <a:ea typeface=""/>
+        <a:latin typeface="Zen Maru Gothic"/>
+        <a:ea typeface="Zen Maru Gothic"/>
         <a:cs typeface=""/>
         <a:font script="Jpan" typeface="ＭＳ Ｐゴシック"/>
         <a:font script="Hang" typeface="맑은 고딕"/>
